--- a/クレイドル・プロ.pptx
+++ b/クレイドル・プロ.pptx
@@ -4,9 +4,16 @@
   <p:sldMasterIdLst>
     <p:sldMasterId id="2147483678" r:id="rId1"/>
   </p:sldMasterIdLst>
+  <p:notesMasterIdLst>
+    <p:notesMasterId r:id="rId8"/>
+  </p:notesMasterIdLst>
   <p:sldIdLst>
     <p:sldId id="256" r:id="rId2"/>
     <p:sldId id="257" r:id="rId3"/>
+    <p:sldId id="258" r:id="rId4"/>
+    <p:sldId id="259" r:id="rId5"/>
+    <p:sldId id="260" r:id="rId6"/>
+    <p:sldId id="261" r:id="rId7"/>
   </p:sldIdLst>
   <p:sldSz cx="12192000" cy="6858000"/>
   <p:notesSz cx="6858000" cy="9144000"/>
@@ -106,6 +113,440 @@
     </a:lvl9pPr>
   </p:defaultTextStyle>
 </p:presentation>
+</file>
+
+<file path=ppt/notesMasters/notesMaster1.xml><?xml version="1.0" encoding="utf-8"?>
+<p:notesMaster xmlns:a="http://schemas.openxmlformats.org/drawingml/2006/main" xmlns:r="http://schemas.openxmlformats.org/officeDocument/2006/relationships" xmlns:p="http://schemas.openxmlformats.org/presentationml/2006/main">
+  <p:cSld>
+    <p:bg>
+      <p:bgRef idx="1001">
+        <a:schemeClr val="bg1"/>
+      </p:bgRef>
+    </p:bg>
+    <p:spTree>
+      <p:nvGrpSpPr>
+        <p:cNvPr id="1" name=""/>
+        <p:cNvGrpSpPr/>
+        <p:nvPr/>
+      </p:nvGrpSpPr>
+      <p:grpSpPr>
+        <a:xfrm>
+          <a:off x="0" y="0"/>
+          <a:ext cx="0" cy="0"/>
+          <a:chOff x="0" y="0"/>
+          <a:chExt cx="0" cy="0"/>
+        </a:xfrm>
+      </p:grpSpPr>
+      <p:sp>
+        <p:nvSpPr>
+          <p:cNvPr id="2" name="Header Placeholder 1"/>
+          <p:cNvSpPr>
+            <a:spLocks noGrp="1"/>
+          </p:cNvSpPr>
+          <p:nvPr>
+            <p:ph type="hdr" sz="quarter"/>
+          </p:nvPr>
+        </p:nvSpPr>
+        <p:spPr>
+          <a:xfrm>
+            <a:off x="0" y="0"/>
+            <a:ext cx="2971800" cy="458788"/>
+          </a:xfrm>
+          <a:prstGeom prst="rect">
+            <a:avLst/>
+          </a:prstGeom>
+        </p:spPr>
+        <p:txBody>
+          <a:bodyPr vert="horz" lIns="91440" tIns="45720" rIns="91440" bIns="45720" rtlCol="0"/>
+          <a:lstStyle>
+            <a:lvl1pPr algn="l">
+              <a:defRPr sz="1200"/>
+            </a:lvl1pPr>
+          </a:lstStyle>
+          <a:p>
+            <a:endParaRPr kumimoji="1" lang="ja-JP" altLang="en-US"/>
+          </a:p>
+        </p:txBody>
+      </p:sp>
+      <p:sp>
+        <p:nvSpPr>
+          <p:cNvPr id="3" name="Date Placeholder 2"/>
+          <p:cNvSpPr>
+            <a:spLocks noGrp="1"/>
+          </p:cNvSpPr>
+          <p:nvPr>
+            <p:ph type="dt" idx="1"/>
+          </p:nvPr>
+        </p:nvSpPr>
+        <p:spPr>
+          <a:xfrm>
+            <a:off x="3884613" y="0"/>
+            <a:ext cx="2971800" cy="458788"/>
+          </a:xfrm>
+          <a:prstGeom prst="rect">
+            <a:avLst/>
+          </a:prstGeom>
+        </p:spPr>
+        <p:txBody>
+          <a:bodyPr vert="horz" lIns="91440" tIns="45720" rIns="91440" bIns="45720" rtlCol="0"/>
+          <a:lstStyle>
+            <a:lvl1pPr algn="r">
+              <a:defRPr sz="1200"/>
+            </a:lvl1pPr>
+          </a:lstStyle>
+          <a:p>
+            <a:fld id="{57E5BBBB-1B90-4927-A9C6-94CA1E76F9D9}" type="datetimeFigureOut">
+              <a:rPr kumimoji="1" lang="ja-JP" altLang="en-US" smtClean="0"/>
+              <a:t>2026/6/14</a:t>
+            </a:fld>
+            <a:endParaRPr kumimoji="1" lang="ja-JP" altLang="en-US"/>
+          </a:p>
+        </p:txBody>
+      </p:sp>
+      <p:sp>
+        <p:nvSpPr>
+          <p:cNvPr id="4" name="Slide Image Placeholder 3"/>
+          <p:cNvSpPr>
+            <a:spLocks noGrp="1" noRot="1" noChangeAspect="1"/>
+          </p:cNvSpPr>
+          <p:nvPr>
+            <p:ph type="sldImg" idx="2"/>
+          </p:nvPr>
+        </p:nvSpPr>
+        <p:spPr>
+          <a:xfrm>
+            <a:off x="685800" y="1143000"/>
+            <a:ext cx="5486400" cy="3086100"/>
+          </a:xfrm>
+          <a:prstGeom prst="rect">
+            <a:avLst/>
+          </a:prstGeom>
+          <a:noFill/>
+          <a:ln w="12700">
+            <a:solidFill>
+              <a:prstClr val="black"/>
+            </a:solidFill>
+          </a:ln>
+        </p:spPr>
+        <p:txBody>
+          <a:bodyPr vert="horz" lIns="91440" tIns="45720" rIns="91440" bIns="45720" rtlCol="0" anchor="ctr"/>
+          <a:lstStyle/>
+          <a:p>
+            <a:endParaRPr lang="ja-JP" altLang="en-US"/>
+          </a:p>
+        </p:txBody>
+      </p:sp>
+      <p:sp>
+        <p:nvSpPr>
+          <p:cNvPr id="5" name="Notes Placeholder 4"/>
+          <p:cNvSpPr>
+            <a:spLocks noGrp="1"/>
+          </p:cNvSpPr>
+          <p:nvPr>
+            <p:ph type="body" sz="quarter" idx="3"/>
+          </p:nvPr>
+        </p:nvSpPr>
+        <p:spPr>
+          <a:xfrm>
+            <a:off x="685800" y="4400550"/>
+            <a:ext cx="5486400" cy="3600450"/>
+          </a:xfrm>
+          <a:prstGeom prst="rect">
+            <a:avLst/>
+          </a:prstGeom>
+        </p:spPr>
+        <p:txBody>
+          <a:bodyPr vert="horz" lIns="91440" tIns="45720" rIns="91440" bIns="45720" rtlCol="0"/>
+          <a:lstStyle/>
+          <a:p>
+            <a:pPr lvl="0"/>
+            <a:r>
+              <a:rPr kumimoji="1" lang="en-US" altLang="ja-JP"/>
+              <a:t>Click to edit Master text styles</a:t>
+            </a:r>
+          </a:p>
+          <a:p>
+            <a:pPr lvl="1"/>
+            <a:r>
+              <a:rPr kumimoji="1" lang="en-US" altLang="ja-JP"/>
+              <a:t>Second level</a:t>
+            </a:r>
+          </a:p>
+          <a:p>
+            <a:pPr lvl="2"/>
+            <a:r>
+              <a:rPr kumimoji="1" lang="en-US" altLang="ja-JP"/>
+              <a:t>Third level</a:t>
+            </a:r>
+          </a:p>
+          <a:p>
+            <a:pPr lvl="3"/>
+            <a:r>
+              <a:rPr kumimoji="1" lang="en-US" altLang="ja-JP"/>
+              <a:t>Fourth level</a:t>
+            </a:r>
+          </a:p>
+          <a:p>
+            <a:pPr lvl="4"/>
+            <a:r>
+              <a:rPr kumimoji="1" lang="en-US" altLang="ja-JP"/>
+              <a:t>Fifth level</a:t>
+            </a:r>
+            <a:endParaRPr kumimoji="1" lang="ja-JP" altLang="en-US"/>
+          </a:p>
+        </p:txBody>
+      </p:sp>
+      <p:sp>
+        <p:nvSpPr>
+          <p:cNvPr id="6" name="Footer Placeholder 5"/>
+          <p:cNvSpPr>
+            <a:spLocks noGrp="1"/>
+          </p:cNvSpPr>
+          <p:nvPr>
+            <p:ph type="ftr" sz="quarter" idx="4"/>
+          </p:nvPr>
+        </p:nvSpPr>
+        <p:spPr>
+          <a:xfrm>
+            <a:off x="0" y="8685213"/>
+            <a:ext cx="2971800" cy="458787"/>
+          </a:xfrm>
+          <a:prstGeom prst="rect">
+            <a:avLst/>
+          </a:prstGeom>
+        </p:spPr>
+        <p:txBody>
+          <a:bodyPr vert="horz" lIns="91440" tIns="45720" rIns="91440" bIns="45720" rtlCol="0" anchor="b"/>
+          <a:lstStyle>
+            <a:lvl1pPr algn="l">
+              <a:defRPr sz="1200"/>
+            </a:lvl1pPr>
+          </a:lstStyle>
+          <a:p>
+            <a:endParaRPr kumimoji="1" lang="ja-JP" altLang="en-US"/>
+          </a:p>
+        </p:txBody>
+      </p:sp>
+      <p:sp>
+        <p:nvSpPr>
+          <p:cNvPr id="7" name="Slide Number Placeholder 6"/>
+          <p:cNvSpPr>
+            <a:spLocks noGrp="1"/>
+          </p:cNvSpPr>
+          <p:nvPr>
+            <p:ph type="sldNum" sz="quarter" idx="5"/>
+          </p:nvPr>
+        </p:nvSpPr>
+        <p:spPr>
+          <a:xfrm>
+            <a:off x="3884613" y="8685213"/>
+            <a:ext cx="2971800" cy="458787"/>
+          </a:xfrm>
+          <a:prstGeom prst="rect">
+            <a:avLst/>
+          </a:prstGeom>
+        </p:spPr>
+        <p:txBody>
+          <a:bodyPr vert="horz" lIns="91440" tIns="45720" rIns="91440" bIns="45720" rtlCol="0" anchor="b"/>
+          <a:lstStyle>
+            <a:lvl1pPr algn="r">
+              <a:defRPr sz="1200"/>
+            </a:lvl1pPr>
+          </a:lstStyle>
+          <a:p>
+            <a:fld id="{623DF577-0044-4E91-A140-DE0DEBE31FF7}" type="slidenum">
+              <a:rPr kumimoji="1" lang="ja-JP" altLang="en-US" smtClean="0"/>
+              <a:t>‹#›</a:t>
+            </a:fld>
+            <a:endParaRPr kumimoji="1" lang="ja-JP" altLang="en-US"/>
+          </a:p>
+        </p:txBody>
+      </p:sp>
+    </p:spTree>
+    <p:extLst>
+      <p:ext uri="{BB962C8B-B14F-4D97-AF65-F5344CB8AC3E}">
+        <p14:creationId xmlns:p14="http://schemas.microsoft.com/office/powerpoint/2010/main" val="3325026403"/>
+      </p:ext>
+    </p:extLst>
+  </p:cSld>
+  <p:clrMap bg1="lt1" tx1="dk1" bg2="lt2" tx2="dk2" accent1="accent1" accent2="accent2" accent3="accent3" accent4="accent4" accent5="accent5" accent6="accent6" hlink="hlink" folHlink="folHlink"/>
+  <p:notesStyle>
+    <a:lvl1pPr marL="0" algn="l" defTabSz="914400" rtl="0" eaLnBrk="1" latinLnBrk="0" hangingPunct="1">
+      <a:defRPr kumimoji="1" sz="1200" kern="1200">
+        <a:solidFill>
+          <a:schemeClr val="tx1"/>
+        </a:solidFill>
+        <a:latin typeface="+mn-lt"/>
+        <a:ea typeface="+mn-ea"/>
+        <a:cs typeface="+mn-cs"/>
+      </a:defRPr>
+    </a:lvl1pPr>
+    <a:lvl2pPr marL="457200" algn="l" defTabSz="914400" rtl="0" eaLnBrk="1" latinLnBrk="0" hangingPunct="1">
+      <a:defRPr kumimoji="1" sz="1200" kern="1200">
+        <a:solidFill>
+          <a:schemeClr val="tx1"/>
+        </a:solidFill>
+        <a:latin typeface="+mn-lt"/>
+        <a:ea typeface="+mn-ea"/>
+        <a:cs typeface="+mn-cs"/>
+      </a:defRPr>
+    </a:lvl2pPr>
+    <a:lvl3pPr marL="914400" algn="l" defTabSz="914400" rtl="0" eaLnBrk="1" latinLnBrk="0" hangingPunct="1">
+      <a:defRPr kumimoji="1" sz="1200" kern="1200">
+        <a:solidFill>
+          <a:schemeClr val="tx1"/>
+        </a:solidFill>
+        <a:latin typeface="+mn-lt"/>
+        <a:ea typeface="+mn-ea"/>
+        <a:cs typeface="+mn-cs"/>
+      </a:defRPr>
+    </a:lvl3pPr>
+    <a:lvl4pPr marL="1371600" algn="l" defTabSz="914400" rtl="0" eaLnBrk="1" latinLnBrk="0" hangingPunct="1">
+      <a:defRPr kumimoji="1" sz="1200" kern="1200">
+        <a:solidFill>
+          <a:schemeClr val="tx1"/>
+        </a:solidFill>
+        <a:latin typeface="+mn-lt"/>
+        <a:ea typeface="+mn-ea"/>
+        <a:cs typeface="+mn-cs"/>
+      </a:defRPr>
+    </a:lvl4pPr>
+    <a:lvl5pPr marL="1828800" algn="l" defTabSz="914400" rtl="0" eaLnBrk="1" latinLnBrk="0" hangingPunct="1">
+      <a:defRPr kumimoji="1" sz="1200" kern="1200">
+        <a:solidFill>
+          <a:schemeClr val="tx1"/>
+        </a:solidFill>
+        <a:latin typeface="+mn-lt"/>
+        <a:ea typeface="+mn-ea"/>
+        <a:cs typeface="+mn-cs"/>
+      </a:defRPr>
+    </a:lvl5pPr>
+    <a:lvl6pPr marL="2286000" algn="l" defTabSz="914400" rtl="0" eaLnBrk="1" latinLnBrk="0" hangingPunct="1">
+      <a:defRPr kumimoji="1" sz="1200" kern="1200">
+        <a:solidFill>
+          <a:schemeClr val="tx1"/>
+        </a:solidFill>
+        <a:latin typeface="+mn-lt"/>
+        <a:ea typeface="+mn-ea"/>
+        <a:cs typeface="+mn-cs"/>
+      </a:defRPr>
+    </a:lvl6pPr>
+    <a:lvl7pPr marL="2743200" algn="l" defTabSz="914400" rtl="0" eaLnBrk="1" latinLnBrk="0" hangingPunct="1">
+      <a:defRPr kumimoji="1" sz="1200" kern="1200">
+        <a:solidFill>
+          <a:schemeClr val="tx1"/>
+        </a:solidFill>
+        <a:latin typeface="+mn-lt"/>
+        <a:ea typeface="+mn-ea"/>
+        <a:cs typeface="+mn-cs"/>
+      </a:defRPr>
+    </a:lvl7pPr>
+    <a:lvl8pPr marL="3200400" algn="l" defTabSz="914400" rtl="0" eaLnBrk="1" latinLnBrk="0" hangingPunct="1">
+      <a:defRPr kumimoji="1" sz="1200" kern="1200">
+        <a:solidFill>
+          <a:schemeClr val="tx1"/>
+        </a:solidFill>
+        <a:latin typeface="+mn-lt"/>
+        <a:ea typeface="+mn-ea"/>
+        <a:cs typeface="+mn-cs"/>
+      </a:defRPr>
+    </a:lvl8pPr>
+    <a:lvl9pPr marL="3657600" algn="l" defTabSz="914400" rtl="0" eaLnBrk="1" latinLnBrk="0" hangingPunct="1">
+      <a:defRPr kumimoji="1" sz="1200" kern="1200">
+        <a:solidFill>
+          <a:schemeClr val="tx1"/>
+        </a:solidFill>
+        <a:latin typeface="+mn-lt"/>
+        <a:ea typeface="+mn-ea"/>
+        <a:cs typeface="+mn-cs"/>
+      </a:defRPr>
+    </a:lvl9pPr>
+  </p:notesStyle>
+</p:notesMaster>
+</file>
+
+<file path=ppt/notesSlides/notesSlide1.xml><?xml version="1.0" encoding="utf-8"?>
+<p:notes xmlns:a="http://schemas.openxmlformats.org/drawingml/2006/main" xmlns:r="http://schemas.openxmlformats.org/officeDocument/2006/relationships" xmlns:p="http://schemas.openxmlformats.org/presentationml/2006/main">
+  <p:cSld>
+    <p:spTree>
+      <p:nvGrpSpPr>
+        <p:cNvPr id="1" name=""/>
+        <p:cNvGrpSpPr/>
+        <p:nvPr/>
+      </p:nvGrpSpPr>
+      <p:grpSpPr>
+        <a:xfrm>
+          <a:off x="0" y="0"/>
+          <a:ext cx="0" cy="0"/>
+          <a:chOff x="0" y="0"/>
+          <a:chExt cx="0" cy="0"/>
+        </a:xfrm>
+      </p:grpSpPr>
+      <p:sp>
+        <p:nvSpPr>
+          <p:cNvPr id="2" name="Slide Image Placeholder 1"/>
+          <p:cNvSpPr>
+            <a:spLocks noGrp="1" noRot="1" noChangeAspect="1"/>
+          </p:cNvSpPr>
+          <p:nvPr>
+            <p:ph type="sldImg"/>
+          </p:nvPr>
+        </p:nvSpPr>
+        <p:spPr/>
+      </p:sp>
+      <p:sp>
+        <p:nvSpPr>
+          <p:cNvPr id="3" name="Notes Placeholder 2"/>
+          <p:cNvSpPr>
+            <a:spLocks noGrp="1"/>
+          </p:cNvSpPr>
+          <p:nvPr>
+            <p:ph type="body" idx="1"/>
+          </p:nvPr>
+        </p:nvSpPr>
+        <p:spPr/>
+        <p:txBody>
+          <a:bodyPr/>
+          <a:lstStyle/>
+          <a:p>
+            <a:endParaRPr kumimoji="1" lang="ja-JP" altLang="en-US" dirty="0"/>
+          </a:p>
+        </p:txBody>
+      </p:sp>
+      <p:sp>
+        <p:nvSpPr>
+          <p:cNvPr id="4" name="Slide Number Placeholder 3"/>
+          <p:cNvSpPr>
+            <a:spLocks noGrp="1"/>
+          </p:cNvSpPr>
+          <p:nvPr>
+            <p:ph type="sldNum" sz="quarter" idx="5"/>
+          </p:nvPr>
+        </p:nvSpPr>
+        <p:spPr/>
+        <p:txBody>
+          <a:bodyPr/>
+          <a:lstStyle/>
+          <a:p>
+            <a:fld id="{623DF577-0044-4E91-A140-DE0DEBE31FF7}" type="slidenum">
+              <a:rPr kumimoji="1" lang="ja-JP" altLang="en-US" smtClean="0"/>
+              <a:t>2</a:t>
+            </a:fld>
+            <a:endParaRPr kumimoji="1" lang="ja-JP" altLang="en-US"/>
+          </a:p>
+        </p:txBody>
+      </p:sp>
+    </p:spTree>
+    <p:extLst>
+      <p:ext uri="{BB962C8B-B14F-4D97-AF65-F5344CB8AC3E}">
+        <p14:creationId xmlns:p14="http://schemas.microsoft.com/office/powerpoint/2010/main" val="3499152517"/>
+      </p:ext>
+    </p:extLst>
+  </p:cSld>
+  <p:clrMapOvr>
+    <a:masterClrMapping/>
+  </p:clrMapOvr>
+</p:notes>
 </file>
 
 <file path=ppt/slideLayouts/slideLayout1.xml><?xml version="1.0" encoding="utf-8"?>
@@ -5872,13 +6313,13 @@
           <a:p>
             <a:pPr algn="ctr"/>
             <a:r>
-              <a:rPr lang="ja-JP" altLang="ja-JP" sz="6600" dirty="0">
+              <a:rPr lang="ja-JP" altLang="ja-JP" sz="6600" u="sng" dirty="0">
                 <a:latin typeface="游明朝" panose="02020400000000000000" pitchFamily="18" charset="-128"/>
                 <a:ea typeface="游明朝" panose="02020400000000000000" pitchFamily="18" charset="-128"/>
               </a:rPr>
               <a:t>クレイドル・プロトコル</a:t>
             </a:r>
-            <a:endParaRPr kumimoji="1" lang="ja-JP" sz="6600" noProof="0" dirty="0">
+            <a:endParaRPr kumimoji="1" lang="ja-JP" sz="6600" u="sng" noProof="0" dirty="0">
               <a:latin typeface="游明朝" panose="02020400000000000000" pitchFamily="18" charset="-128"/>
               <a:ea typeface="游明朝" panose="02020400000000000000" pitchFamily="18" charset="-128"/>
             </a:endParaRPr>
@@ -6094,13 +6535,13 @@
           <a:p>
             <a:pPr algn="ctr"/>
             <a:r>
-              <a:rPr lang="ja-JP" altLang="ja-JP" dirty="0">
+              <a:rPr lang="ja-JP" altLang="ja-JP" u="sng" dirty="0">
                 <a:latin typeface="游明朝" panose="02020400000000000000" pitchFamily="18" charset="-128"/>
                 <a:ea typeface="游明朝" panose="02020400000000000000" pitchFamily="18" charset="-128"/>
               </a:rPr>
               <a:t>コンセプト</a:t>
             </a:r>
-            <a:endParaRPr kumimoji="1" lang="ja-JP" altLang="en-US" dirty="0">
+            <a:endParaRPr kumimoji="1" lang="ja-JP" altLang="en-US" u="sng" dirty="0">
               <a:latin typeface="游明朝" panose="02020400000000000000" pitchFamily="18" charset="-128"/>
               <a:ea typeface="游明朝" panose="02020400000000000000" pitchFamily="18" charset="-128"/>
             </a:endParaRPr>
@@ -6121,8 +6562,8 @@
         </p:nvSpPr>
         <p:spPr>
           <a:xfrm>
-            <a:off x="3063240" y="1097280"/>
-            <a:ext cx="5724144" cy="646331"/>
+            <a:off x="348996" y="1097280"/>
+            <a:ext cx="11494008" cy="584775"/>
           </a:xfrm>
           <a:prstGeom prst="rect">
             <a:avLst/>
@@ -6135,11 +6576,625 @@
           </a:bodyPr>
           <a:lstStyle/>
           <a:p>
-            <a:r>
-              <a:rPr lang="ja-JP" altLang="ja-JP"/>
+            <a:pPr algn="ctr"/>
+            <a:r>
+              <a:rPr lang="ja-JP" altLang="ja-JP" sz="3200" dirty="0"/>
               <a:t>深海に沈む密室（潜水艦）で目を覚ました記憶喪失の10人——</a:t>
             </a:r>
+            <a:endParaRPr kumimoji="1" lang="ja-JP" altLang="en-US" sz="3200" dirty="0"/>
+          </a:p>
+        </p:txBody>
+      </p:sp>
+      <p:sp>
+        <p:nvSpPr>
+          <p:cNvPr id="8" name="Rectangle 7">
+            <a:extLst>
+              <a:ext uri="{FF2B5EF4-FFF2-40B4-BE49-F238E27FC236}">
+                <a16:creationId xmlns:a16="http://schemas.microsoft.com/office/drawing/2014/main" id="{18E8B789-6F8C-D944-6EF4-0B15E2DFA905}"/>
+              </a:ext>
+            </a:extLst>
+          </p:cNvPr>
+          <p:cNvSpPr/>
+          <p:nvPr/>
+        </p:nvSpPr>
+        <p:spPr>
+          <a:xfrm>
+            <a:off x="0" y="1682054"/>
+            <a:ext cx="6096000" cy="5175945"/>
+          </a:xfrm>
+          <a:prstGeom prst="rect">
+            <a:avLst/>
+          </a:prstGeom>
+          <a:solidFill>
+            <a:srgbClr val="FF4B4B"/>
+          </a:solidFill>
+          <a:ln>
+            <a:noFill/>
+          </a:ln>
+        </p:spPr>
+        <p:style>
+          <a:lnRef idx="2">
+            <a:schemeClr val="accent1">
+              <a:shade val="15000"/>
+            </a:schemeClr>
+          </a:lnRef>
+          <a:fillRef idx="1">
+            <a:schemeClr val="accent1"/>
+          </a:fillRef>
+          <a:effectRef idx="0">
+            <a:schemeClr val="accent1"/>
+          </a:effectRef>
+          <a:fontRef idx="minor">
+            <a:schemeClr val="lt1"/>
+          </a:fontRef>
+        </p:style>
+        <p:txBody>
+          <a:bodyPr rtlCol="0" anchor="ctr"/>
+          <a:lstStyle/>
+          <a:p>
+            <a:pPr algn="ctr"/>
             <a:endParaRPr kumimoji="1" lang="ja-JP" altLang="en-US"/>
+          </a:p>
+        </p:txBody>
+      </p:sp>
+      <p:sp>
+        <p:nvSpPr>
+          <p:cNvPr id="9" name="Rectangle 8">
+            <a:extLst>
+              <a:ext uri="{FF2B5EF4-FFF2-40B4-BE49-F238E27FC236}">
+                <a16:creationId xmlns:a16="http://schemas.microsoft.com/office/drawing/2014/main" id="{6E616C8D-5A29-3D00-CE49-1DF71103434D}"/>
+              </a:ext>
+            </a:extLst>
+          </p:cNvPr>
+          <p:cNvSpPr/>
+          <p:nvPr/>
+        </p:nvSpPr>
+        <p:spPr>
+          <a:xfrm>
+            <a:off x="6096000" y="1682054"/>
+            <a:ext cx="6096000" cy="5175945"/>
+          </a:xfrm>
+          <a:prstGeom prst="rect">
+            <a:avLst/>
+          </a:prstGeom>
+          <a:ln>
+            <a:noFill/>
+          </a:ln>
+        </p:spPr>
+        <p:style>
+          <a:lnRef idx="2">
+            <a:schemeClr val="accent1">
+              <a:shade val="15000"/>
+            </a:schemeClr>
+          </a:lnRef>
+          <a:fillRef idx="1">
+            <a:schemeClr val="accent1"/>
+          </a:fillRef>
+          <a:effectRef idx="0">
+            <a:schemeClr val="accent1"/>
+          </a:effectRef>
+          <a:fontRef idx="minor">
+            <a:schemeClr val="lt1"/>
+          </a:fontRef>
+        </p:style>
+        <p:txBody>
+          <a:bodyPr rtlCol="0" anchor="ctr"/>
+          <a:lstStyle/>
+          <a:p>
+            <a:pPr algn="ctr"/>
+            <a:endParaRPr kumimoji="1" lang="ja-JP" altLang="en-US"/>
+          </a:p>
+        </p:txBody>
+      </p:sp>
+      <p:sp>
+        <p:nvSpPr>
+          <p:cNvPr id="10" name="Right Triangle 9">
+            <a:extLst>
+              <a:ext uri="{FF2B5EF4-FFF2-40B4-BE49-F238E27FC236}">
+                <a16:creationId xmlns:a16="http://schemas.microsoft.com/office/drawing/2014/main" id="{7110C6B2-9793-FE0C-89E7-69F431075952}"/>
+              </a:ext>
+            </a:extLst>
+          </p:cNvPr>
+          <p:cNvSpPr/>
+          <p:nvPr/>
+        </p:nvSpPr>
+        <p:spPr>
+          <a:xfrm flipV="1">
+            <a:off x="5209749" y="1682052"/>
+            <a:ext cx="1681825" cy="5175945"/>
+          </a:xfrm>
+          <a:prstGeom prst="rtTriangle">
+            <a:avLst/>
+          </a:prstGeom>
+          <a:solidFill>
+            <a:srgbClr val="FF4B4B"/>
+          </a:solidFill>
+          <a:ln>
+            <a:noFill/>
+          </a:ln>
+        </p:spPr>
+        <p:style>
+          <a:lnRef idx="2">
+            <a:schemeClr val="accent1">
+              <a:shade val="15000"/>
+            </a:schemeClr>
+          </a:lnRef>
+          <a:fillRef idx="1">
+            <a:schemeClr val="accent1"/>
+          </a:fillRef>
+          <a:effectRef idx="0">
+            <a:schemeClr val="accent1"/>
+          </a:effectRef>
+          <a:fontRef idx="minor">
+            <a:schemeClr val="lt1"/>
+          </a:fontRef>
+        </p:style>
+        <p:txBody>
+          <a:bodyPr rtlCol="0" anchor="ctr"/>
+          <a:lstStyle/>
+          <a:p>
+            <a:pPr algn="ctr"/>
+            <a:endParaRPr kumimoji="1" lang="ja-JP" altLang="en-US" dirty="0"/>
+          </a:p>
+        </p:txBody>
+      </p:sp>
+      <p:sp>
+        <p:nvSpPr>
+          <p:cNvPr id="11" name="Right Triangle 10">
+            <a:extLst>
+              <a:ext uri="{FF2B5EF4-FFF2-40B4-BE49-F238E27FC236}">
+                <a16:creationId xmlns:a16="http://schemas.microsoft.com/office/drawing/2014/main" id="{1B16199A-DBDA-D027-A814-EEA2E1A1EB2E}"/>
+              </a:ext>
+            </a:extLst>
+          </p:cNvPr>
+          <p:cNvSpPr/>
+          <p:nvPr/>
+        </p:nvSpPr>
+        <p:spPr>
+          <a:xfrm rot="10800000" flipV="1">
+            <a:off x="5209748" y="1682052"/>
+            <a:ext cx="1681825" cy="5175945"/>
+          </a:xfrm>
+          <a:prstGeom prst="rtTriangle">
+            <a:avLst/>
+          </a:prstGeom>
+          <a:ln>
+            <a:noFill/>
+          </a:ln>
+        </p:spPr>
+        <p:style>
+          <a:lnRef idx="2">
+            <a:schemeClr val="accent1">
+              <a:shade val="15000"/>
+            </a:schemeClr>
+          </a:lnRef>
+          <a:fillRef idx="1">
+            <a:schemeClr val="accent1"/>
+          </a:fillRef>
+          <a:effectRef idx="0">
+            <a:schemeClr val="accent1"/>
+          </a:effectRef>
+          <a:fontRef idx="minor">
+            <a:schemeClr val="lt1"/>
+          </a:fontRef>
+        </p:style>
+        <p:txBody>
+          <a:bodyPr rtlCol="0" anchor="ctr"/>
+          <a:lstStyle/>
+          <a:p>
+            <a:pPr algn="ctr"/>
+            <a:endParaRPr kumimoji="1" lang="ja-JP" altLang="en-US"/>
+          </a:p>
+        </p:txBody>
+      </p:sp>
+      <p:sp>
+        <p:nvSpPr>
+          <p:cNvPr id="13" name="TextBox 12">
+            <a:extLst>
+              <a:ext uri="{FF2B5EF4-FFF2-40B4-BE49-F238E27FC236}">
+                <a16:creationId xmlns:a16="http://schemas.microsoft.com/office/drawing/2014/main" id="{13C16E72-DCD1-D4DF-0AE9-725ED7CF46B6}"/>
+              </a:ext>
+            </a:extLst>
+          </p:cNvPr>
+          <p:cNvSpPr txBox="1"/>
+          <p:nvPr/>
+        </p:nvSpPr>
+        <p:spPr>
+          <a:xfrm>
+            <a:off x="-89154" y="1795914"/>
+            <a:ext cx="6094476" cy="707886"/>
+          </a:xfrm>
+          <a:prstGeom prst="rect">
+            <a:avLst/>
+          </a:prstGeom>
+          <a:noFill/>
+        </p:spPr>
+        <p:txBody>
+          <a:bodyPr wrap="square">
+            <a:spAutoFit/>
+          </a:bodyPr>
+          <a:lstStyle/>
+          <a:p>
+            <a:r>
+              <a:rPr lang="ja-JP" altLang="ja-JP" sz="4000" dirty="0"/>
+              <a:t>「誰が裏切り者か？」</a:t>
+            </a:r>
+            <a:endParaRPr lang="ja-JP" altLang="en-US" sz="4000" dirty="0"/>
+          </a:p>
+        </p:txBody>
+      </p:sp>
+      <p:sp>
+        <p:nvSpPr>
+          <p:cNvPr id="15" name="TextBox 14">
+            <a:extLst>
+              <a:ext uri="{FF2B5EF4-FFF2-40B4-BE49-F238E27FC236}">
+                <a16:creationId xmlns:a16="http://schemas.microsoft.com/office/drawing/2014/main" id="{134C7CC9-5764-7877-296D-E0CA3803E750}"/>
+              </a:ext>
+            </a:extLst>
+          </p:cNvPr>
+          <p:cNvSpPr txBox="1"/>
+          <p:nvPr/>
+        </p:nvSpPr>
+        <p:spPr>
+          <a:xfrm>
+            <a:off x="6666066" y="1698828"/>
+            <a:ext cx="6249924" cy="707886"/>
+          </a:xfrm>
+          <a:prstGeom prst="rect">
+            <a:avLst/>
+          </a:prstGeom>
+          <a:noFill/>
+        </p:spPr>
+        <p:txBody>
+          <a:bodyPr wrap="square">
+            <a:spAutoFit/>
+          </a:bodyPr>
+          <a:lstStyle/>
+          <a:p>
+            <a:r>
+              <a:rPr lang="ja-JP" altLang="ja-JP" sz="4000" dirty="0"/>
+              <a:t>「自分たちは何者か？」</a:t>
+            </a:r>
+            <a:endParaRPr lang="ja-JP" altLang="en-US" sz="4000" dirty="0"/>
+          </a:p>
+        </p:txBody>
+      </p:sp>
+      <p:sp>
+        <p:nvSpPr>
+          <p:cNvPr id="17" name="TextBox 16">
+            <a:extLst>
+              <a:ext uri="{FF2B5EF4-FFF2-40B4-BE49-F238E27FC236}">
+                <a16:creationId xmlns:a16="http://schemas.microsoft.com/office/drawing/2014/main" id="{6532B928-AF8A-D98C-3368-F875110DF489}"/>
+              </a:ext>
+            </a:extLst>
+          </p:cNvPr>
+          <p:cNvSpPr txBox="1"/>
+          <p:nvPr/>
+        </p:nvSpPr>
+        <p:spPr>
+          <a:xfrm>
+            <a:off x="0" y="3977636"/>
+            <a:ext cx="12344400" cy="584775"/>
+          </a:xfrm>
+          <a:prstGeom prst="rect">
+            <a:avLst/>
+          </a:prstGeom>
+          <a:solidFill>
+            <a:schemeClr val="bg1">
+              <a:lumMod val="85000"/>
+              <a:lumOff val="15000"/>
+            </a:schemeClr>
+          </a:solidFill>
+        </p:spPr>
+        <p:txBody>
+          <a:bodyPr wrap="square">
+            <a:spAutoFit/>
+          </a:bodyPr>
+          <a:lstStyle/>
+          <a:p>
+            <a:pPr algn="ctr"/>
+            <a:r>
+              <a:rPr lang="ja-JP" altLang="ja-JP" sz="3200" dirty="0"/>
+              <a:t>しかし、仲間の傷口から流れた血は </a:t>
+            </a:r>
+            <a:r>
+              <a:rPr lang="ja-JP" altLang="ja-JP" sz="3200" b="1" dirty="0"/>
+              <a:t>[ </a:t>
+            </a:r>
+            <a:r>
+              <a:rPr lang="ja-JP" altLang="ja-JP" sz="3200" b="1" dirty="0">
+                <a:solidFill>
+                  <a:srgbClr val="FF0000"/>
+                </a:solidFill>
+              </a:rPr>
+              <a:t>赤</a:t>
+            </a:r>
+            <a:r>
+              <a:rPr lang="ja-JP" altLang="ja-JP" sz="3200" b="1" dirty="0"/>
+              <a:t> ]</a:t>
+            </a:r>
+            <a:r>
+              <a:rPr lang="ja-JP" altLang="ja-JP" sz="3200" dirty="0"/>
+              <a:t> では</a:t>
+            </a:r>
+            <a:r>
+              <a:rPr lang="ja-JP" altLang="en-US" sz="3200" dirty="0"/>
+              <a:t>なかった</a:t>
+            </a:r>
+            <a:r>
+              <a:rPr lang="ja-JP" altLang="ja-JP" sz="3200" dirty="0"/>
+              <a:t>……</a:t>
+            </a:r>
+            <a:endParaRPr lang="ja-JP" altLang="en-US" sz="3200" dirty="0"/>
+          </a:p>
+        </p:txBody>
+      </p:sp>
+      <p:sp>
+        <p:nvSpPr>
+          <p:cNvPr id="19" name="TextBox 18">
+            <a:extLst>
+              <a:ext uri="{FF2B5EF4-FFF2-40B4-BE49-F238E27FC236}">
+                <a16:creationId xmlns:a16="http://schemas.microsoft.com/office/drawing/2014/main" id="{089A05E5-4F84-B04F-4B2E-7CFFAD366FAD}"/>
+              </a:ext>
+            </a:extLst>
+          </p:cNvPr>
+          <p:cNvSpPr txBox="1"/>
+          <p:nvPr/>
+        </p:nvSpPr>
+        <p:spPr>
+          <a:xfrm>
+            <a:off x="109538" y="2581245"/>
+            <a:ext cx="6611112" cy="584775"/>
+          </a:xfrm>
+          <a:prstGeom prst="rect">
+            <a:avLst/>
+          </a:prstGeom>
+          <a:noFill/>
+        </p:spPr>
+        <p:txBody>
+          <a:bodyPr wrap="square">
+            <a:spAutoFit/>
+          </a:bodyPr>
+          <a:lstStyle/>
+          <a:p>
+            <a:r>
+              <a:rPr lang="ja-JP" altLang="ja-JP" sz="3200" dirty="0"/>
+              <a:t>対話</a:t>
+            </a:r>
+            <a:r>
+              <a:rPr lang="ja-JP" altLang="en-US" sz="3200" dirty="0"/>
+              <a:t>と証拠</a:t>
+            </a:r>
+            <a:r>
+              <a:rPr lang="ja-JP" altLang="ja-JP" sz="3200" dirty="0"/>
+              <a:t>から嘘と矛盾を突き</a:t>
+            </a:r>
+            <a:endParaRPr lang="ja-JP" altLang="en-US" sz="3200" dirty="0"/>
+          </a:p>
+        </p:txBody>
+      </p:sp>
+      <p:sp>
+        <p:nvSpPr>
+          <p:cNvPr id="21" name="TextBox 20">
+            <a:extLst>
+              <a:ext uri="{FF2B5EF4-FFF2-40B4-BE49-F238E27FC236}">
+                <a16:creationId xmlns:a16="http://schemas.microsoft.com/office/drawing/2014/main" id="{254D5A62-515E-E0D8-064B-9E8AD2DEA50E}"/>
+              </a:ext>
+            </a:extLst>
+          </p:cNvPr>
+          <p:cNvSpPr txBox="1"/>
+          <p:nvPr/>
+        </p:nvSpPr>
+        <p:spPr>
+          <a:xfrm>
+            <a:off x="109538" y="3133248"/>
+            <a:ext cx="7639812" cy="584775"/>
+          </a:xfrm>
+          <a:prstGeom prst="rect">
+            <a:avLst/>
+          </a:prstGeom>
+          <a:noFill/>
+        </p:spPr>
+        <p:txBody>
+          <a:bodyPr wrap="square">
+            <a:spAutoFit/>
+          </a:bodyPr>
+          <a:lstStyle/>
+          <a:p>
+            <a:r>
+              <a:rPr lang="ja-JP" altLang="ja-JP" sz="3200" dirty="0"/>
+              <a:t>互いを疑い合う犯人探し</a:t>
+            </a:r>
+            <a:endParaRPr lang="ja-JP" altLang="en-US" sz="3200" dirty="0"/>
+          </a:p>
+        </p:txBody>
+      </p:sp>
+      <p:sp>
+        <p:nvSpPr>
+          <p:cNvPr id="23" name="TextBox 22">
+            <a:extLst>
+              <a:ext uri="{FF2B5EF4-FFF2-40B4-BE49-F238E27FC236}">
+                <a16:creationId xmlns:a16="http://schemas.microsoft.com/office/drawing/2014/main" id="{F92A4CAD-D83B-5247-5631-BD505E442D31}"/>
+              </a:ext>
+            </a:extLst>
+          </p:cNvPr>
+          <p:cNvSpPr txBox="1"/>
+          <p:nvPr/>
+        </p:nvSpPr>
+        <p:spPr>
+          <a:xfrm>
+            <a:off x="6692647" y="2564859"/>
+            <a:ext cx="6611112" cy="584775"/>
+          </a:xfrm>
+          <a:prstGeom prst="rect">
+            <a:avLst/>
+          </a:prstGeom>
+          <a:noFill/>
+        </p:spPr>
+        <p:txBody>
+          <a:bodyPr wrap="square">
+            <a:spAutoFit/>
+          </a:bodyPr>
+          <a:lstStyle/>
+          <a:p>
+            <a:r>
+              <a:rPr lang="ja-JP" altLang="ja-JP" sz="3200" dirty="0"/>
+              <a:t>己がかつての人間を模倣した</a:t>
+            </a:r>
+            <a:endParaRPr lang="ja-JP" altLang="en-US" sz="3200" dirty="0"/>
+          </a:p>
+        </p:txBody>
+      </p:sp>
+      <p:sp>
+        <p:nvSpPr>
+          <p:cNvPr id="25" name="TextBox 24">
+            <a:extLst>
+              <a:ext uri="{FF2B5EF4-FFF2-40B4-BE49-F238E27FC236}">
+                <a16:creationId xmlns:a16="http://schemas.microsoft.com/office/drawing/2014/main" id="{166BF0D2-BEEC-7068-7B17-7CDC9B26AE4A}"/>
+              </a:ext>
+            </a:extLst>
+          </p:cNvPr>
+          <p:cNvSpPr txBox="1"/>
+          <p:nvPr/>
+        </p:nvSpPr>
+        <p:spPr>
+          <a:xfrm>
+            <a:off x="6304788" y="3149634"/>
+            <a:ext cx="7195185" cy="584775"/>
+          </a:xfrm>
+          <a:prstGeom prst="rect">
+            <a:avLst/>
+          </a:prstGeom>
+          <a:noFill/>
+        </p:spPr>
+        <p:txBody>
+          <a:bodyPr wrap="square">
+            <a:spAutoFit/>
+          </a:bodyPr>
+          <a:lstStyle/>
+          <a:p>
+            <a:r>
+              <a:rPr lang="ja-JP" altLang="ja-JP" sz="3200" dirty="0"/>
+              <a:t>未知の生命体であるという真実</a:t>
+            </a:r>
+            <a:endParaRPr lang="ja-JP" altLang="en-US" sz="3200" dirty="0"/>
+          </a:p>
+        </p:txBody>
+      </p:sp>
+      <p:sp>
+        <p:nvSpPr>
+          <p:cNvPr id="27" name="Rectangle 26">
+            <a:extLst>
+              <a:ext uri="{FF2B5EF4-FFF2-40B4-BE49-F238E27FC236}">
+                <a16:creationId xmlns:a16="http://schemas.microsoft.com/office/drawing/2014/main" id="{BFBE2323-EF0A-42E8-BEFE-072B853BCD80}"/>
+              </a:ext>
+            </a:extLst>
+          </p:cNvPr>
+          <p:cNvSpPr/>
+          <p:nvPr/>
+        </p:nvSpPr>
+        <p:spPr>
+          <a:xfrm>
+            <a:off x="0" y="4919472"/>
+            <a:ext cx="12192000" cy="1731827"/>
+          </a:xfrm>
+          <a:prstGeom prst="rect">
+            <a:avLst/>
+          </a:prstGeom>
+          <a:solidFill>
+            <a:schemeClr val="bg1">
+              <a:lumMod val="85000"/>
+              <a:lumOff val="15000"/>
+            </a:schemeClr>
+          </a:solidFill>
+        </p:spPr>
+        <p:style>
+          <a:lnRef idx="2">
+            <a:schemeClr val="accent1">
+              <a:shade val="15000"/>
+            </a:schemeClr>
+          </a:lnRef>
+          <a:fillRef idx="1">
+            <a:schemeClr val="accent1"/>
+          </a:fillRef>
+          <a:effectRef idx="0">
+            <a:schemeClr val="accent1"/>
+          </a:effectRef>
+          <a:fontRef idx="minor">
+            <a:schemeClr val="lt1"/>
+          </a:fontRef>
+        </p:style>
+        <p:txBody>
+          <a:bodyPr rtlCol="0" anchor="ctr"/>
+          <a:lstStyle/>
+          <a:p>
+            <a:pPr algn="ctr"/>
+            <a:endParaRPr kumimoji="1" lang="ja-JP" altLang="en-US"/>
+          </a:p>
+        </p:txBody>
+      </p:sp>
+      <p:sp>
+        <p:nvSpPr>
+          <p:cNvPr id="26" name="TextBox 25">
+            <a:extLst>
+              <a:ext uri="{FF2B5EF4-FFF2-40B4-BE49-F238E27FC236}">
+                <a16:creationId xmlns:a16="http://schemas.microsoft.com/office/drawing/2014/main" id="{9D1614B2-32FA-0B12-AEC0-18B0C153274C}"/>
+              </a:ext>
+            </a:extLst>
+          </p:cNvPr>
+          <p:cNvSpPr txBox="1"/>
+          <p:nvPr/>
+        </p:nvSpPr>
+        <p:spPr>
+          <a:xfrm>
+            <a:off x="246888" y="5081639"/>
+            <a:ext cx="11698224" cy="1569660"/>
+          </a:xfrm>
+          <a:prstGeom prst="rect">
+            <a:avLst/>
+          </a:prstGeom>
+          <a:noFill/>
+        </p:spPr>
+        <p:txBody>
+          <a:bodyPr wrap="square" rtlCol="0">
+            <a:spAutoFit/>
+          </a:bodyPr>
+          <a:lstStyle/>
+          <a:p>
+            <a:pPr algn="ctr"/>
+            <a:r>
+              <a:rPr lang="ja-JP" altLang="en-US" sz="3200" dirty="0"/>
+              <a:t>逃げ場のない</a:t>
+            </a:r>
+            <a:r>
+              <a:rPr lang="ja-JP" altLang="ja-JP" sz="3200" dirty="0"/>
+              <a:t>深海の「閉塞感」 × 嘘を暴き合う「</a:t>
+            </a:r>
+            <a:r>
+              <a:rPr lang="ja-JP" altLang="en-US" sz="3200" dirty="0"/>
+              <a:t>犯人探し</a:t>
+            </a:r>
+            <a:r>
+              <a:rPr lang="ja-JP" altLang="ja-JP" sz="3200" dirty="0"/>
+              <a:t>」</a:t>
+            </a:r>
+            <a:endParaRPr lang="en-US" altLang="ja-JP" sz="3200" dirty="0"/>
+          </a:p>
+          <a:p>
+            <a:pPr algn="ctr"/>
+            <a:r>
+              <a:rPr lang="ja-JP" altLang="en-US" sz="3200" dirty="0"/>
+              <a:t>そして</a:t>
+            </a:r>
+            <a:endParaRPr lang="en-US" altLang="ja-JP" sz="3200" dirty="0"/>
+          </a:p>
+          <a:p>
+            <a:pPr algn="ctr"/>
+            <a:r>
+              <a:rPr lang="ja-JP" altLang="ja-JP" sz="3200" dirty="0"/>
+              <a:t>犯人探しがすべて覆る、圧倒的なパラダイムシフト</a:t>
+            </a:r>
+            <a:endParaRPr lang="en-US" altLang="ja-JP" sz="3200" dirty="0"/>
           </a:p>
         </p:txBody>
       </p:sp>
@@ -6147,6 +7202,416 @@
     <p:extLst>
       <p:ext uri="{BB962C8B-B14F-4D97-AF65-F5344CB8AC3E}">
         <p14:creationId xmlns:p14="http://schemas.microsoft.com/office/powerpoint/2010/main" val="91181683"/>
+      </p:ext>
+    </p:extLst>
+  </p:cSld>
+  <p:clrMapOvr>
+    <a:masterClrMapping/>
+  </p:clrMapOvr>
+</p:sld>
+</file>
+
+<file path=ppt/slides/slide3.xml><?xml version="1.0" encoding="utf-8"?>
+<p:sld xmlns:a="http://schemas.openxmlformats.org/drawingml/2006/main" xmlns:r="http://schemas.openxmlformats.org/officeDocument/2006/relationships" xmlns:p="http://schemas.openxmlformats.org/presentationml/2006/main">
+  <p:cSld>
+    <p:spTree>
+      <p:nvGrpSpPr>
+        <p:cNvPr id="1" name=""/>
+        <p:cNvGrpSpPr/>
+        <p:nvPr/>
+      </p:nvGrpSpPr>
+      <p:grpSpPr>
+        <a:xfrm>
+          <a:off x="0" y="0"/>
+          <a:ext cx="0" cy="0"/>
+          <a:chOff x="0" y="0"/>
+          <a:chExt cx="0" cy="0"/>
+        </a:xfrm>
+      </p:grpSpPr>
+      <p:sp>
+        <p:nvSpPr>
+          <p:cNvPr id="2" name="Title 1">
+            <a:extLst>
+              <a:ext uri="{FF2B5EF4-FFF2-40B4-BE49-F238E27FC236}">
+                <a16:creationId xmlns:a16="http://schemas.microsoft.com/office/drawing/2014/main" id="{5894076D-005F-AB71-51E1-9312A647496F}"/>
+              </a:ext>
+            </a:extLst>
+          </p:cNvPr>
+          <p:cNvSpPr>
+            <a:spLocks noGrp="1"/>
+          </p:cNvSpPr>
+          <p:nvPr>
+            <p:ph type="title"/>
+          </p:nvPr>
+        </p:nvSpPr>
+        <p:spPr/>
+        <p:txBody>
+          <a:bodyPr/>
+          <a:lstStyle/>
+          <a:p>
+            <a:endParaRPr kumimoji="1" lang="ja-JP" altLang="en-US"/>
+          </a:p>
+        </p:txBody>
+      </p:sp>
+      <p:sp>
+        <p:nvSpPr>
+          <p:cNvPr id="3" name="Content Placeholder 2">
+            <a:extLst>
+              <a:ext uri="{FF2B5EF4-FFF2-40B4-BE49-F238E27FC236}">
+                <a16:creationId xmlns:a16="http://schemas.microsoft.com/office/drawing/2014/main" id="{ED390DE5-C0C4-268A-4A80-C68820F24FC0}"/>
+              </a:ext>
+            </a:extLst>
+          </p:cNvPr>
+          <p:cNvSpPr>
+            <a:spLocks noGrp="1"/>
+          </p:cNvSpPr>
+          <p:nvPr>
+            <p:ph idx="1"/>
+          </p:nvPr>
+        </p:nvSpPr>
+        <p:spPr/>
+        <p:txBody>
+          <a:bodyPr/>
+          <a:lstStyle/>
+          <a:p>
+            <a:endParaRPr kumimoji="1" lang="ja-JP" altLang="en-US"/>
+          </a:p>
+        </p:txBody>
+      </p:sp>
+    </p:spTree>
+    <p:extLst>
+      <p:ext uri="{BB962C8B-B14F-4D97-AF65-F5344CB8AC3E}">
+        <p14:creationId xmlns:p14="http://schemas.microsoft.com/office/powerpoint/2010/main" val="1499587357"/>
+      </p:ext>
+    </p:extLst>
+  </p:cSld>
+  <p:clrMapOvr>
+    <a:masterClrMapping/>
+  </p:clrMapOvr>
+</p:sld>
+</file>
+
+<file path=ppt/slides/slide4.xml><?xml version="1.0" encoding="utf-8"?>
+<p:sld xmlns:a="http://schemas.openxmlformats.org/drawingml/2006/main" xmlns:r="http://schemas.openxmlformats.org/officeDocument/2006/relationships" xmlns:p="http://schemas.openxmlformats.org/presentationml/2006/main">
+  <p:cSld>
+    <p:spTree>
+      <p:nvGrpSpPr>
+        <p:cNvPr id="1" name=""/>
+        <p:cNvGrpSpPr/>
+        <p:nvPr/>
+      </p:nvGrpSpPr>
+      <p:grpSpPr>
+        <a:xfrm>
+          <a:off x="0" y="0"/>
+          <a:ext cx="0" cy="0"/>
+          <a:chOff x="0" y="0"/>
+          <a:chExt cx="0" cy="0"/>
+        </a:xfrm>
+      </p:grpSpPr>
+      <p:sp>
+        <p:nvSpPr>
+          <p:cNvPr id="2" name="Title 1">
+            <a:extLst>
+              <a:ext uri="{FF2B5EF4-FFF2-40B4-BE49-F238E27FC236}">
+                <a16:creationId xmlns:a16="http://schemas.microsoft.com/office/drawing/2014/main" id="{F1243A57-6B25-8938-F3BC-910A298E3E94}"/>
+              </a:ext>
+            </a:extLst>
+          </p:cNvPr>
+          <p:cNvSpPr>
+            <a:spLocks noGrp="1"/>
+          </p:cNvSpPr>
+          <p:nvPr>
+            <p:ph type="title"/>
+          </p:nvPr>
+        </p:nvSpPr>
+        <p:spPr/>
+        <p:txBody>
+          <a:bodyPr/>
+          <a:lstStyle/>
+          <a:p>
+            <a:endParaRPr kumimoji="1" lang="ja-JP" altLang="en-US"/>
+          </a:p>
+        </p:txBody>
+      </p:sp>
+      <p:sp>
+        <p:nvSpPr>
+          <p:cNvPr id="3" name="Content Placeholder 2">
+            <a:extLst>
+              <a:ext uri="{FF2B5EF4-FFF2-40B4-BE49-F238E27FC236}">
+                <a16:creationId xmlns:a16="http://schemas.microsoft.com/office/drawing/2014/main" id="{7346BE99-0860-635B-3658-5BAE7BEE20E1}"/>
+              </a:ext>
+            </a:extLst>
+          </p:cNvPr>
+          <p:cNvSpPr>
+            <a:spLocks noGrp="1"/>
+          </p:cNvSpPr>
+          <p:nvPr>
+            <p:ph idx="1"/>
+          </p:nvPr>
+        </p:nvSpPr>
+        <p:spPr/>
+        <p:txBody>
+          <a:bodyPr/>
+          <a:lstStyle/>
+          <a:p>
+            <a:endParaRPr kumimoji="1" lang="ja-JP" altLang="en-US"/>
+          </a:p>
+        </p:txBody>
+      </p:sp>
+      <p:pic>
+        <p:nvPicPr>
+          <p:cNvPr id="5" name="Picture 4">
+            <a:extLst>
+              <a:ext uri="{FF2B5EF4-FFF2-40B4-BE49-F238E27FC236}">
+                <a16:creationId xmlns:a16="http://schemas.microsoft.com/office/drawing/2014/main" id="{B55D412F-00BE-F4D3-CB6C-0176E4415678}"/>
+              </a:ext>
+            </a:extLst>
+          </p:cNvPr>
+          <p:cNvPicPr>
+            <a:picLocks noChangeAspect="1"/>
+          </p:cNvPicPr>
+          <p:nvPr/>
+        </p:nvPicPr>
+        <p:blipFill>
+          <a:blip r:embed="rId2"/>
+          <a:stretch>
+            <a:fillRect/>
+          </a:stretch>
+        </p:blipFill>
+        <p:spPr>
+          <a:xfrm>
+            <a:off x="1120000" y="847364"/>
+            <a:ext cx="9364382" cy="5163271"/>
+          </a:xfrm>
+          <a:prstGeom prst="rect">
+            <a:avLst/>
+          </a:prstGeom>
+        </p:spPr>
+      </p:pic>
+    </p:spTree>
+    <p:extLst>
+      <p:ext uri="{BB962C8B-B14F-4D97-AF65-F5344CB8AC3E}">
+        <p14:creationId xmlns:p14="http://schemas.microsoft.com/office/powerpoint/2010/main" val="503537557"/>
+      </p:ext>
+    </p:extLst>
+  </p:cSld>
+  <p:clrMapOvr>
+    <a:masterClrMapping/>
+  </p:clrMapOvr>
+</p:sld>
+</file>
+
+<file path=ppt/slides/slide5.xml><?xml version="1.0" encoding="utf-8"?>
+<p:sld xmlns:a="http://schemas.openxmlformats.org/drawingml/2006/main" xmlns:r="http://schemas.openxmlformats.org/officeDocument/2006/relationships" xmlns:p="http://schemas.openxmlformats.org/presentationml/2006/main">
+  <p:cSld>
+    <p:spTree>
+      <p:nvGrpSpPr>
+        <p:cNvPr id="1" name=""/>
+        <p:cNvGrpSpPr/>
+        <p:nvPr/>
+      </p:nvGrpSpPr>
+      <p:grpSpPr>
+        <a:xfrm>
+          <a:off x="0" y="0"/>
+          <a:ext cx="0" cy="0"/>
+          <a:chOff x="0" y="0"/>
+          <a:chExt cx="0" cy="0"/>
+        </a:xfrm>
+      </p:grpSpPr>
+      <p:sp>
+        <p:nvSpPr>
+          <p:cNvPr id="2" name="Title 1">
+            <a:extLst>
+              <a:ext uri="{FF2B5EF4-FFF2-40B4-BE49-F238E27FC236}">
+                <a16:creationId xmlns:a16="http://schemas.microsoft.com/office/drawing/2014/main" id="{0DFD654D-1D83-F787-1AE8-6CB4C19FFB8C}"/>
+              </a:ext>
+            </a:extLst>
+          </p:cNvPr>
+          <p:cNvSpPr>
+            <a:spLocks noGrp="1"/>
+          </p:cNvSpPr>
+          <p:nvPr>
+            <p:ph type="title"/>
+          </p:nvPr>
+        </p:nvSpPr>
+        <p:spPr/>
+        <p:txBody>
+          <a:bodyPr/>
+          <a:lstStyle/>
+          <a:p>
+            <a:endParaRPr kumimoji="1" lang="ja-JP" altLang="en-US"/>
+          </a:p>
+        </p:txBody>
+      </p:sp>
+      <p:sp>
+        <p:nvSpPr>
+          <p:cNvPr id="3" name="Content Placeholder 2">
+            <a:extLst>
+              <a:ext uri="{FF2B5EF4-FFF2-40B4-BE49-F238E27FC236}">
+                <a16:creationId xmlns:a16="http://schemas.microsoft.com/office/drawing/2014/main" id="{24094CD8-8DAA-6191-6150-3AE0DB815ABC}"/>
+              </a:ext>
+            </a:extLst>
+          </p:cNvPr>
+          <p:cNvSpPr>
+            <a:spLocks noGrp="1"/>
+          </p:cNvSpPr>
+          <p:nvPr>
+            <p:ph idx="1"/>
+          </p:nvPr>
+        </p:nvSpPr>
+        <p:spPr/>
+        <p:txBody>
+          <a:bodyPr/>
+          <a:lstStyle/>
+          <a:p>
+            <a:endParaRPr kumimoji="1" lang="ja-JP" altLang="en-US"/>
+          </a:p>
+        </p:txBody>
+      </p:sp>
+      <p:pic>
+        <p:nvPicPr>
+          <p:cNvPr id="5" name="Picture 4">
+            <a:extLst>
+              <a:ext uri="{FF2B5EF4-FFF2-40B4-BE49-F238E27FC236}">
+                <a16:creationId xmlns:a16="http://schemas.microsoft.com/office/drawing/2014/main" id="{1A323AC9-C741-E797-9353-EDA2642E05D7}"/>
+              </a:ext>
+            </a:extLst>
+          </p:cNvPr>
+          <p:cNvPicPr>
+            <a:picLocks noChangeAspect="1"/>
+          </p:cNvPicPr>
+          <p:nvPr/>
+        </p:nvPicPr>
+        <p:blipFill>
+          <a:blip r:embed="rId2"/>
+          <a:stretch>
+            <a:fillRect/>
+          </a:stretch>
+        </p:blipFill>
+        <p:spPr>
+          <a:xfrm>
+            <a:off x="1418572" y="918812"/>
+            <a:ext cx="9354856" cy="5020376"/>
+          </a:xfrm>
+          <a:prstGeom prst="rect">
+            <a:avLst/>
+          </a:prstGeom>
+        </p:spPr>
+      </p:pic>
+    </p:spTree>
+    <p:extLst>
+      <p:ext uri="{BB962C8B-B14F-4D97-AF65-F5344CB8AC3E}">
+        <p14:creationId xmlns:p14="http://schemas.microsoft.com/office/powerpoint/2010/main" val="140087540"/>
+      </p:ext>
+    </p:extLst>
+  </p:cSld>
+  <p:clrMapOvr>
+    <a:masterClrMapping/>
+  </p:clrMapOvr>
+</p:sld>
+</file>
+
+<file path=ppt/slides/slide6.xml><?xml version="1.0" encoding="utf-8"?>
+<p:sld xmlns:a="http://schemas.openxmlformats.org/drawingml/2006/main" xmlns:r="http://schemas.openxmlformats.org/officeDocument/2006/relationships" xmlns:p="http://schemas.openxmlformats.org/presentationml/2006/main">
+  <p:cSld>
+    <p:spTree>
+      <p:nvGrpSpPr>
+        <p:cNvPr id="1" name=""/>
+        <p:cNvGrpSpPr/>
+        <p:nvPr/>
+      </p:nvGrpSpPr>
+      <p:grpSpPr>
+        <a:xfrm>
+          <a:off x="0" y="0"/>
+          <a:ext cx="0" cy="0"/>
+          <a:chOff x="0" y="0"/>
+          <a:chExt cx="0" cy="0"/>
+        </a:xfrm>
+      </p:grpSpPr>
+      <p:sp>
+        <p:nvSpPr>
+          <p:cNvPr id="2" name="Title 1">
+            <a:extLst>
+              <a:ext uri="{FF2B5EF4-FFF2-40B4-BE49-F238E27FC236}">
+                <a16:creationId xmlns:a16="http://schemas.microsoft.com/office/drawing/2014/main" id="{2B93BA61-8A00-EE64-7A72-679EF28514BC}"/>
+              </a:ext>
+            </a:extLst>
+          </p:cNvPr>
+          <p:cNvSpPr>
+            <a:spLocks noGrp="1"/>
+          </p:cNvSpPr>
+          <p:nvPr>
+            <p:ph type="title"/>
+          </p:nvPr>
+        </p:nvSpPr>
+        <p:spPr/>
+        <p:txBody>
+          <a:bodyPr/>
+          <a:lstStyle/>
+          <a:p>
+            <a:endParaRPr kumimoji="1" lang="ja-JP" altLang="en-US"/>
+          </a:p>
+        </p:txBody>
+      </p:sp>
+      <p:sp>
+        <p:nvSpPr>
+          <p:cNvPr id="3" name="Content Placeholder 2">
+            <a:extLst>
+              <a:ext uri="{FF2B5EF4-FFF2-40B4-BE49-F238E27FC236}">
+                <a16:creationId xmlns:a16="http://schemas.microsoft.com/office/drawing/2014/main" id="{F325414A-6C28-C159-9259-3E8CA7E7009A}"/>
+              </a:ext>
+            </a:extLst>
+          </p:cNvPr>
+          <p:cNvSpPr>
+            <a:spLocks noGrp="1"/>
+          </p:cNvSpPr>
+          <p:nvPr>
+            <p:ph idx="1"/>
+          </p:nvPr>
+        </p:nvSpPr>
+        <p:spPr/>
+        <p:txBody>
+          <a:bodyPr/>
+          <a:lstStyle/>
+          <a:p>
+            <a:endParaRPr kumimoji="1" lang="ja-JP" altLang="en-US"/>
+          </a:p>
+        </p:txBody>
+      </p:sp>
+      <p:pic>
+        <p:nvPicPr>
+          <p:cNvPr id="5" name="Picture 4">
+            <a:extLst>
+              <a:ext uri="{FF2B5EF4-FFF2-40B4-BE49-F238E27FC236}">
+                <a16:creationId xmlns:a16="http://schemas.microsoft.com/office/drawing/2014/main" id="{6DEE5AF7-0456-36BF-315A-498C5A880495}"/>
+              </a:ext>
+            </a:extLst>
+          </p:cNvPr>
+          <p:cNvPicPr>
+            <a:picLocks noChangeAspect="1"/>
+          </p:cNvPicPr>
+          <p:nvPr/>
+        </p:nvPicPr>
+        <p:blipFill>
+          <a:blip r:embed="rId2"/>
+          <a:stretch>
+            <a:fillRect/>
+          </a:stretch>
+        </p:blipFill>
+        <p:spPr>
+          <a:xfrm>
+            <a:off x="1409046" y="804496"/>
+            <a:ext cx="9373908" cy="5249008"/>
+          </a:xfrm>
+          <a:prstGeom prst="rect">
+            <a:avLst/>
+          </a:prstGeom>
+        </p:spPr>
+      </p:pic>
+    </p:spTree>
+    <p:extLst>
+      <p:ext uri="{BB962C8B-B14F-4D97-AF65-F5344CB8AC3E}">
+        <p14:creationId xmlns:p14="http://schemas.microsoft.com/office/powerpoint/2010/main" val="210944673"/>
       </p:ext>
     </p:extLst>
   </p:cSld>
@@ -6415,4 +7880,319 @@
     </a:ext>
   </a:extLst>
 </a:theme>
+</file>
+
+<file path=ppt/theme/theme2.xml><?xml version="1.0" encoding="utf-8"?>
+<a:theme xmlns:a="http://schemas.openxmlformats.org/drawingml/2006/main" name="Office Theme">
+  <a:themeElements>
+    <a:clrScheme name="Office">
+      <a:dk1>
+        <a:sysClr val="windowText" lastClr="000000"/>
+      </a:dk1>
+      <a:lt1>
+        <a:sysClr val="window" lastClr="FFFFFF"/>
+      </a:lt1>
+      <a:dk2>
+        <a:srgbClr val="0E2841"/>
+      </a:dk2>
+      <a:lt2>
+        <a:srgbClr val="E8E8E8"/>
+      </a:lt2>
+      <a:accent1>
+        <a:srgbClr val="156082"/>
+      </a:accent1>
+      <a:accent2>
+        <a:srgbClr val="E97132"/>
+      </a:accent2>
+      <a:accent3>
+        <a:srgbClr val="196B24"/>
+      </a:accent3>
+      <a:accent4>
+        <a:srgbClr val="0F9ED5"/>
+      </a:accent4>
+      <a:accent5>
+        <a:srgbClr val="A02B93"/>
+      </a:accent5>
+      <a:accent6>
+        <a:srgbClr val="4EA72E"/>
+      </a:accent6>
+      <a:hlink>
+        <a:srgbClr val="467886"/>
+      </a:hlink>
+      <a:folHlink>
+        <a:srgbClr val="96607D"/>
+      </a:folHlink>
+    </a:clrScheme>
+    <a:fontScheme name="Office">
+      <a:majorFont>
+        <a:latin typeface="游ゴシック Light" panose="02110004020202020204"/>
+        <a:ea typeface=""/>
+        <a:cs typeface=""/>
+        <a:font script="Jpan" typeface="游ゴシック Light"/>
+        <a:font script="Hang" typeface="맑은 고딕"/>
+        <a:font script="Hans" typeface="等线 Light"/>
+        <a:font script="Hant" typeface="新細明體"/>
+        <a:font script="Arab" typeface="Times New Roman"/>
+        <a:font script="Hebr" typeface="Times New Roman"/>
+        <a:font script="Thai" typeface="Angsana New"/>
+        <a:font script="Ethi" typeface="Nyala"/>
+        <a:font script="Beng" typeface="Vrinda"/>
+        <a:font script="Gujr" typeface="Shruti"/>
+        <a:font script="Khmr" typeface="MoolBoran"/>
+        <a:font script="Knda" typeface="Tunga"/>
+        <a:font script="Guru" typeface="Raavi"/>
+        <a:font script="Cans" typeface="Euphemia"/>
+        <a:font script="Cher" typeface="Plantagenet Cherokee"/>
+        <a:font script="Yiii" typeface="Microsoft Yi Baiti"/>
+        <a:font script="Tibt" typeface="Microsoft Himalaya"/>
+        <a:font script="Thaa" typeface="MV Boli"/>
+        <a:font script="Deva" typeface="Mangal"/>
+        <a:font script="Telu" typeface="Gautami"/>
+        <a:font script="Taml" typeface="Latha"/>
+        <a:font script="Syrc" typeface="Estrangelo Edessa"/>
+        <a:font script="Orya" typeface="Kalinga"/>
+        <a:font script="Mlym" typeface="Kartika"/>
+        <a:font script="Laoo" typeface="DokChampa"/>
+        <a:font script="Sinh" typeface="Iskoola Pota"/>
+        <a:font script="Mong" typeface="Mongolian Baiti"/>
+        <a:font script="Viet" typeface="Times New Roman"/>
+        <a:font script="Uigh" typeface="Microsoft Uighur"/>
+        <a:font script="Geor" typeface="Sylfaen"/>
+        <a:font script="Armn" typeface="Arial"/>
+        <a:font script="Bugi" typeface="Leelawadee UI"/>
+        <a:font script="Bopo" typeface="Microsoft JhengHei"/>
+        <a:font script="Java" typeface="Javanese Text"/>
+        <a:font script="Lisu" typeface="Segoe UI"/>
+        <a:font script="Mymr" typeface="Myanmar Text"/>
+        <a:font script="Nkoo" typeface="Ebrima"/>
+        <a:font script="Olck" typeface="Nirmala UI"/>
+        <a:font script="Osma" typeface="Ebrima"/>
+        <a:font script="Phag" typeface="Phagspa"/>
+        <a:font script="Syrn" typeface="Estrangelo Edessa"/>
+        <a:font script="Syrj" typeface="Estrangelo Edessa"/>
+        <a:font script="Syre" typeface="Estrangelo Edessa"/>
+        <a:font script="Sora" typeface="Nirmala UI"/>
+        <a:font script="Tale" typeface="Microsoft Tai Le"/>
+        <a:font script="Talu" typeface="Microsoft New Tai Lue"/>
+        <a:font script="Tfng" typeface="Ebrima"/>
+      </a:majorFont>
+      <a:minorFont>
+        <a:latin typeface="游ゴシック" panose="02110004020202020204"/>
+        <a:ea typeface=""/>
+        <a:cs typeface=""/>
+        <a:font script="Jpan" typeface="游ゴシック"/>
+        <a:font script="Hang" typeface="맑은 고딕"/>
+        <a:font script="Hans" typeface="等线"/>
+        <a:font script="Hant" typeface="新細明體"/>
+        <a:font script="Arab" typeface="Arial"/>
+        <a:font script="Hebr" typeface="Arial"/>
+        <a:font script="Thai" typeface="Cordia New"/>
+        <a:font script="Ethi" typeface="Nyala"/>
+        <a:font script="Beng" typeface="Vrinda"/>
+        <a:font script="Gujr" typeface="Shruti"/>
+        <a:font script="Khmr" typeface="DaunPenh"/>
+        <a:font script="Knda" typeface="Tunga"/>
+        <a:font script="Guru" typeface="Raavi"/>
+        <a:font script="Cans" typeface="Euphemia"/>
+        <a:font script="Cher" typeface="Plantagenet Cherokee"/>
+        <a:font script="Yiii" typeface="Microsoft Yi Baiti"/>
+        <a:font script="Tibt" typeface="Microsoft Himalaya"/>
+        <a:font script="Thaa" typeface="MV Boli"/>
+        <a:font script="Deva" typeface="Mangal"/>
+        <a:font script="Telu" typeface="Gautami"/>
+        <a:font script="Taml" typeface="Latha"/>
+        <a:font script="Syrc" typeface="Estrangelo Edessa"/>
+        <a:font script="Orya" typeface="Kalinga"/>
+        <a:font script="Mlym" typeface="Kartika"/>
+        <a:font script="Laoo" typeface="DokChampa"/>
+        <a:font script="Sinh" typeface="Iskoola Pota"/>
+        <a:font script="Mong" typeface="Mongolian Baiti"/>
+        <a:font script="Viet" typeface="Arial"/>
+        <a:font script="Uigh" typeface="Microsoft Uighur"/>
+        <a:font script="Geor" typeface="Sylfaen"/>
+        <a:font script="Armn" typeface="Arial"/>
+        <a:font script="Bugi" typeface="Leelawadee UI"/>
+        <a:font script="Bopo" typeface="Microsoft JhengHei"/>
+        <a:font script="Java" typeface="Javanese Text"/>
+        <a:font script="Lisu" typeface="Segoe UI"/>
+        <a:font script="Mymr" typeface="Myanmar Text"/>
+        <a:font script="Nkoo" typeface="Ebrima"/>
+        <a:font script="Olck" typeface="Nirmala UI"/>
+        <a:font script="Osma" typeface="Ebrima"/>
+        <a:font script="Phag" typeface="Phagspa"/>
+        <a:font script="Syrn" typeface="Estrangelo Edessa"/>
+        <a:font script="Syrj" typeface="Estrangelo Edessa"/>
+        <a:font script="Syre" typeface="Estrangelo Edessa"/>
+        <a:font script="Sora" typeface="Nirmala UI"/>
+        <a:font script="Tale" typeface="Microsoft Tai Le"/>
+        <a:font script="Talu" typeface="Microsoft New Tai Lue"/>
+        <a:font script="Tfng" typeface="Ebrima"/>
+      </a:minorFont>
+    </a:fontScheme>
+    <a:fmtScheme name="Office">
+      <a:fillStyleLst>
+        <a:solidFill>
+          <a:schemeClr val="phClr"/>
+        </a:solidFill>
+        <a:gradFill rotWithShape="1">
+          <a:gsLst>
+            <a:gs pos="0">
+              <a:schemeClr val="phClr">
+                <a:lumMod val="110000"/>
+                <a:satMod val="105000"/>
+                <a:tint val="67000"/>
+              </a:schemeClr>
+            </a:gs>
+            <a:gs pos="50000">
+              <a:schemeClr val="phClr">
+                <a:lumMod val="105000"/>
+                <a:satMod val="103000"/>
+                <a:tint val="73000"/>
+              </a:schemeClr>
+            </a:gs>
+            <a:gs pos="100000">
+              <a:schemeClr val="phClr">
+                <a:lumMod val="105000"/>
+                <a:satMod val="109000"/>
+                <a:tint val="81000"/>
+              </a:schemeClr>
+            </a:gs>
+          </a:gsLst>
+          <a:lin ang="5400000" scaled="0"/>
+        </a:gradFill>
+        <a:gradFill rotWithShape="1">
+          <a:gsLst>
+            <a:gs pos="0">
+              <a:schemeClr val="phClr">
+                <a:satMod val="103000"/>
+                <a:lumMod val="102000"/>
+                <a:tint val="94000"/>
+              </a:schemeClr>
+            </a:gs>
+            <a:gs pos="50000">
+              <a:schemeClr val="phClr">
+                <a:satMod val="110000"/>
+                <a:lumMod val="100000"/>
+                <a:shade val="100000"/>
+              </a:schemeClr>
+            </a:gs>
+            <a:gs pos="100000">
+              <a:schemeClr val="phClr">
+                <a:lumMod val="99000"/>
+                <a:satMod val="120000"/>
+                <a:shade val="78000"/>
+              </a:schemeClr>
+            </a:gs>
+          </a:gsLst>
+          <a:lin ang="5400000" scaled="0"/>
+        </a:gradFill>
+      </a:fillStyleLst>
+      <a:lnStyleLst>
+        <a:ln w="12700" cap="flat" cmpd="sng" algn="ctr">
+          <a:solidFill>
+            <a:schemeClr val="phClr"/>
+          </a:solidFill>
+          <a:prstDash val="solid"/>
+          <a:miter lim="800000"/>
+        </a:ln>
+        <a:ln w="19050" cap="flat" cmpd="sng" algn="ctr">
+          <a:solidFill>
+            <a:schemeClr val="phClr"/>
+          </a:solidFill>
+          <a:prstDash val="solid"/>
+          <a:miter lim="800000"/>
+        </a:ln>
+        <a:ln w="25400" cap="flat" cmpd="sng" algn="ctr">
+          <a:solidFill>
+            <a:schemeClr val="phClr"/>
+          </a:solidFill>
+          <a:prstDash val="solid"/>
+          <a:miter lim="800000"/>
+        </a:ln>
+      </a:lnStyleLst>
+      <a:effectStyleLst>
+        <a:effectStyle>
+          <a:effectLst/>
+        </a:effectStyle>
+        <a:effectStyle>
+          <a:effectLst/>
+        </a:effectStyle>
+        <a:effectStyle>
+          <a:effectLst>
+            <a:outerShdw blurRad="57150" dist="19050" dir="5400000" algn="ctr" rotWithShape="0">
+              <a:srgbClr val="000000">
+                <a:alpha val="63000"/>
+              </a:srgbClr>
+            </a:outerShdw>
+          </a:effectLst>
+        </a:effectStyle>
+      </a:effectStyleLst>
+      <a:bgFillStyleLst>
+        <a:solidFill>
+          <a:schemeClr val="phClr"/>
+        </a:solidFill>
+        <a:solidFill>
+          <a:schemeClr val="phClr">
+            <a:tint val="95000"/>
+            <a:satMod val="170000"/>
+          </a:schemeClr>
+        </a:solidFill>
+        <a:gradFill rotWithShape="1">
+          <a:gsLst>
+            <a:gs pos="0">
+              <a:schemeClr val="phClr">
+                <a:tint val="93000"/>
+                <a:satMod val="150000"/>
+                <a:shade val="98000"/>
+                <a:lumMod val="102000"/>
+              </a:schemeClr>
+            </a:gs>
+            <a:gs pos="50000">
+              <a:schemeClr val="phClr">
+                <a:tint val="98000"/>
+                <a:satMod val="130000"/>
+                <a:shade val="90000"/>
+                <a:lumMod val="103000"/>
+              </a:schemeClr>
+            </a:gs>
+            <a:gs pos="100000">
+              <a:schemeClr val="phClr">
+                <a:shade val="63000"/>
+                <a:satMod val="120000"/>
+              </a:schemeClr>
+            </a:gs>
+          </a:gsLst>
+          <a:lin ang="5400000" scaled="0"/>
+        </a:gradFill>
+      </a:bgFillStyleLst>
+    </a:fmtScheme>
+  </a:themeElements>
+  <a:objectDefaults>
+    <a:lnDef>
+      <a:spPr/>
+      <a:bodyPr/>
+      <a:lstStyle/>
+      <a:style>
+        <a:lnRef idx="2">
+          <a:schemeClr val="accent1"/>
+        </a:lnRef>
+        <a:fillRef idx="0">
+          <a:schemeClr val="accent1"/>
+        </a:fillRef>
+        <a:effectRef idx="1">
+          <a:schemeClr val="accent1"/>
+        </a:effectRef>
+        <a:fontRef idx="minor">
+          <a:schemeClr val="tx1"/>
+        </a:fontRef>
+      </a:style>
+    </a:lnDef>
+  </a:objectDefaults>
+  <a:extraClrSchemeLst/>
+  <a:extLst>
+    <a:ext uri="{05A4C25C-085E-4340-85A3-A5531E510DB2}">
+      <thm15:themeFamily xmlns:thm15="http://schemas.microsoft.com/office/thememl/2012/main" name="Office Theme" id="{2E142A2C-CD16-42D6-873A-C26D2A0506FA}" vid="{1BDDFF52-6CD6-40A5-AB3C-68EB2F1E4D0A}"/>
+    </a:ext>
+  </a:extLst>
+</a:theme>
 </file>